--- a/templates/20-financial-analysis-template.pptx
+++ b/templates/20-financial-analysis-template.pptx
@@ -3558,7 +3558,7 @@
         <p:spPr>
           <a:xfrm>
             <a:off x="457200" y="1207008"/>
-            <a:ext cx="2743200" cy="182880"/>
+            <a:ext cx="11277295" cy="274320"/>
           </a:xfrm>
           <a:prstGeom prst="rect">
             <a:avLst/>
@@ -3574,13 +3574,13 @@
           <a:p>
             <a:pPr algn="l"/>
             <a:r>
-              <a:rPr lang="en-AU" sz="800" b="1" dirty="0">
+              <a:rPr lang="en-AU" sz="1250" b="1" dirty="0">
                 <a:solidFill>
-                  <a:srgbClr val="6B6A66"/>
+                  <a:srgbClr val="184F95"/>
                 </a:solidFill>
                 <a:latin typeface="Aptos"/>
               </a:rPr>
-              <a:t>HOW TO FILL IT IN</a:t>
+              <a:t>Financial Analysis — blank template</a:t>
             </a:r>
           </a:p>
         </p:txBody>
@@ -3593,8 +3593,8 @@
         </p:nvSpPr>
         <p:spPr>
           <a:xfrm>
-            <a:off x="457200" y="1408176"/>
-            <a:ext cx="2743200" cy="914400"/>
+            <a:off x="457200" y="6089904"/>
+            <a:ext cx="11277295" cy="347472"/>
           </a:xfrm>
           <a:prstGeom prst="rect">
             <a:avLst/>
@@ -3610,9 +3610,9 @@
           <a:p>
             <a:pPr algn="l"/>
             <a:r>
-              <a:rPr lang="en-AU" sz="950" dirty="0">
+              <a:rPr lang="en-AU" sz="850" dirty="0">
                 <a:solidFill>
-                  <a:srgbClr val="0B0B0B"/>
+                  <a:srgbClr val="6B6A66"/>
                 </a:solidFill>
                 <a:latin typeface="Aptos"/>
               </a:rPr>
@@ -3629,8 +3629,8 @@
         </p:nvSpPr>
         <p:spPr>
           <a:xfrm>
-            <a:off x="457200" y="2414016"/>
-            <a:ext cx="2743200" cy="182880"/>
+            <a:off x="1828800" y="1700784"/>
+            <a:ext cx="9905695" cy="237744"/>
           </a:xfrm>
           <a:prstGeom prst="rect">
             <a:avLst/>
@@ -3641,18 +3641,18 @@
           </a:ln>
         </p:spPr>
         <p:txBody>
-          <a:bodyPr wrap="square" anchor="b" lIns="0" rIns="0" tIns="27432" bIns="27432"/>
-          <a:lstStyle/>
-          <a:p>
-            <a:pPr algn="l"/>
-            <a:r>
-              <a:rPr lang="en-AU" sz="800" b="1" dirty="0">
+          <a:bodyPr wrap="square" anchor="ctr" lIns="54864" rIns="54864" tIns="27432" bIns="27432"/>
+          <a:lstStyle/>
+          <a:p>
+            <a:pPr algn="ctr"/>
+            <a:r>
+              <a:rPr lang="en-AU" sz="900" dirty="0">
                 <a:solidFill>
                   <a:srgbClr val="6B6A66"/>
                 </a:solidFill>
                 <a:latin typeface="Aptos"/>
               </a:rPr>
-              <a:t>WHAT IT IS FOR</a:t>
+              <a:t>Use it when →</a:t>
             </a:r>
           </a:p>
         </p:txBody>
@@ -3665,8 +3665,8 @@
         </p:nvSpPr>
         <p:spPr>
           <a:xfrm>
-            <a:off x="457200" y="2615184"/>
-            <a:ext cx="2743200" cy="731520"/>
+            <a:off x="1828800" y="1938528"/>
+            <a:ext cx="4952848" cy="237744"/>
           </a:xfrm>
           <a:prstGeom prst="rect">
             <a:avLst/>
@@ -3677,18 +3677,18 @@
           </a:ln>
         </p:spPr>
         <p:txBody>
-          <a:bodyPr wrap="square" anchor="t" lIns="0" rIns="0" tIns="27432" bIns="27432"/>
-          <a:lstStyle/>
-          <a:p>
-            <a:pPr algn="l"/>
-            <a:r>
-              <a:rPr lang="en-AU" sz="950" dirty="0">
+          <a:bodyPr wrap="square" anchor="ctr" lIns="54864" rIns="54864" tIns="27432" bIns="27432"/>
+          <a:lstStyle/>
+          <a:p>
+            <a:pPr algn="ctr"/>
+            <a:r>
+              <a:rPr lang="en-AU" sz="900" b="1" dirty="0">
                 <a:solidFill>
-                  <a:srgbClr val="0B0B0B"/>
+                  <a:srgbClr val="6B6A66"/>
                 </a:solidFill>
                 <a:latin typeface="Aptos"/>
               </a:rPr>
-              <a:t>Puts a monetary frame around a change: what it costs, what it returns, when the return arrives and what the money is worth once timing and risk are accounted for.</a:t>
+              <a:t>It answers</a:t>
             </a:r>
           </a:p>
         </p:txBody>
@@ -3701,8 +3701,8 @@
         </p:nvSpPr>
         <p:spPr>
           <a:xfrm>
-            <a:off x="457200" y="3438144"/>
-            <a:ext cx="2743200" cy="182880"/>
+            <a:off x="6781648" y="1938528"/>
+            <a:ext cx="4952848" cy="237744"/>
           </a:xfrm>
           <a:prstGeom prst="rect">
             <a:avLst/>
@@ -3713,18 +3713,18 @@
           </a:ln>
         </p:spPr>
         <p:txBody>
-          <a:bodyPr wrap="square" anchor="b" lIns="0" rIns="0" tIns="27432" bIns="27432"/>
-          <a:lstStyle/>
-          <a:p>
-            <a:pPr algn="l"/>
-            <a:r>
-              <a:rPr lang="en-AU" sz="800" b="1" dirty="0">
+          <a:bodyPr wrap="square" anchor="ctr" lIns="54864" rIns="54864" tIns="27432" bIns="27432"/>
+          <a:lstStyle/>
+          <a:p>
+            <a:pPr algn="ctr"/>
+            <a:r>
+              <a:rPr lang="en-AU" sz="900" b="1" dirty="0">
                 <a:solidFill>
                   <a:srgbClr val="6B6A66"/>
                 </a:solidFill>
                 <a:latin typeface="Aptos"/>
               </a:rPr>
-              <a:t>MOST OFTEN CONFUSED WITH</a:t>
+              <a:t>It cannot answer</a:t>
             </a:r>
           </a:p>
         </p:txBody>
@@ -3737,76 +3737,8 @@
         </p:nvSpPr>
         <p:spPr>
           <a:xfrm>
-            <a:off x="457200" y="3639312"/>
-            <a:ext cx="2743200" cy="1737360"/>
-          </a:xfrm>
-          <a:prstGeom prst="rect">
-            <a:avLst/>
-          </a:prstGeom>
-          <a:solidFill>
-            <a:srgbClr val="F7F7F5"/>
-          </a:solidFill>
-          <a:ln>
-            <a:noFill/>
-          </a:ln>
-        </p:spPr>
-        <p:txBody>
-          <a:bodyPr wrap="square" anchor="t" lIns="91440" rIns="91440" tIns="27432" bIns="27432"/>
-          <a:lstStyle/>
-          <a:p>
-            <a:pPr algn="l"/>
-            <a:r>
-              <a:rPr lang="en-AU" sz="900" dirty="0">
-                <a:solidFill>
-                  <a:srgbClr val="0B0B0B"/>
-                </a:solidFill>
-                <a:latin typeface="Aptos"/>
-              </a:rPr>
-              <a:t>Financial analysis values what is already forecast; estimation produces the forecast. And a positive return is not the same as the best option: the exam repeatedly offers an option that is profitable but beaten by an alternative.</a:t>
-            </a:r>
-          </a:p>
-        </p:txBody>
-      </p:sp>
-      <p:sp>
-        <p:nvSpPr>
-          <p:cNvPr id="46" name="shape46"/>
-          <p:cNvSpPr/>
-          <p:nvPr/>
-        </p:nvSpPr>
-        <p:spPr>
-          <a:xfrm>
-            <a:off x="457200" y="3639312"/>
-            <a:ext cx="32004" cy="1737360"/>
-          </a:xfrm>
-          <a:prstGeom prst="rect">
-            <a:avLst/>
-          </a:prstGeom>
-          <a:solidFill>
-            <a:srgbClr val="FAB219"/>
-          </a:solidFill>
-          <a:ln>
-            <a:noFill/>
-          </a:ln>
-        </p:spPr>
-        <p:txBody>
-          <a:bodyPr wrap="square" anchor="ctr" lIns="54864" rIns="54864" tIns="27432" bIns="27432"/>
-          <a:lstStyle/>
-          <a:p>
-            <a:pPr algn="l"/>
-            <a:endParaRPr lang="en-AU" sz="1100"/>
-          </a:p>
-        </p:txBody>
-      </p:sp>
-      <p:sp>
-        <p:nvSpPr>
-          <p:cNvPr id="47" name="shape47"/>
-          <p:cNvSpPr/>
-          <p:nvPr/>
-        </p:nvSpPr>
-        <p:spPr>
-          <a:xfrm>
-            <a:off x="457200" y="5486400"/>
-            <a:ext cx="2743200" cy="502920"/>
+            <a:off x="457200" y="2203704"/>
+            <a:ext cx="1280160" cy="960120"/>
           </a:xfrm>
           <a:prstGeom prst="rect">
             <a:avLst/>
@@ -3817,186 +3749,6 @@
           </a:ln>
         </p:spPr>
         <p:txBody>
-          <a:bodyPr wrap="square" anchor="t" lIns="0" rIns="0" tIns="27432" bIns="27432"/>
-          <a:lstStyle/>
-          <a:p>
-            <a:pPr algn="l"/>
-            <a:r>
-              <a:rPr lang="en-AU" sz="800" dirty="0">
-                <a:solidFill>
-                  <a:srgbClr val="6B6A66"/>
-                </a:solidFill>
-                <a:latin typeface="Aptos"/>
-              </a:rPr>
-              <a:t>Tasks: 6.4 Define Change Strategy · 7.6 Analyze Potential Value and Recommend Solution · 8.5 Recommend Actions to Increase Solution Value</a:t>
-            </a:r>
-          </a:p>
-        </p:txBody>
-      </p:sp>
-      <p:sp>
-        <p:nvSpPr>
-          <p:cNvPr id="48" name="shape48"/>
-          <p:cNvSpPr/>
-          <p:nvPr/>
-        </p:nvSpPr>
-        <p:spPr>
-          <a:xfrm>
-            <a:off x="3520440" y="1188720"/>
-            <a:ext cx="8214055" cy="237744"/>
-          </a:xfrm>
-          <a:prstGeom prst="rect">
-            <a:avLst/>
-          </a:prstGeom>
-          <a:noFill/>
-          <a:ln>
-            <a:noFill/>
-          </a:ln>
-        </p:spPr>
-        <p:txBody>
-          <a:bodyPr wrap="square" anchor="b" lIns="0" rIns="0" tIns="27432" bIns="27432"/>
-          <a:lstStyle/>
-          <a:p>
-            <a:pPr algn="l"/>
-            <a:r>
-              <a:rPr lang="en-AU" sz="1050" b="1" dirty="0">
-                <a:solidFill>
-                  <a:srgbClr val="184F95"/>
-                </a:solidFill>
-                <a:latin typeface="Aptos"/>
-              </a:rPr>
-              <a:t>Financial Analysis — blank template</a:t>
-            </a:r>
-          </a:p>
-        </p:txBody>
-      </p:sp>
-      <p:sp>
-        <p:nvSpPr>
-          <p:cNvPr id="49" name="shape49"/>
-          <p:cNvSpPr/>
-          <p:nvPr/>
-        </p:nvSpPr>
-        <p:spPr>
-          <a:xfrm>
-            <a:off x="4892040" y="1499616"/>
-            <a:ext cx="6842455" cy="237744"/>
-          </a:xfrm>
-          <a:prstGeom prst="rect">
-            <a:avLst/>
-          </a:prstGeom>
-          <a:noFill/>
-          <a:ln>
-            <a:noFill/>
-          </a:ln>
-        </p:spPr>
-        <p:txBody>
-          <a:bodyPr wrap="square" anchor="ctr" lIns="54864" rIns="54864" tIns="27432" bIns="27432"/>
-          <a:lstStyle/>
-          <a:p>
-            <a:pPr algn="ctr"/>
-            <a:r>
-              <a:rPr lang="en-AU" sz="900" dirty="0">
-                <a:solidFill>
-                  <a:srgbClr val="6B6A66"/>
-                </a:solidFill>
-                <a:latin typeface="Aptos"/>
-              </a:rPr>
-              <a:t>Use it when →</a:t>
-            </a:r>
-          </a:p>
-        </p:txBody>
-      </p:sp>
-      <p:sp>
-        <p:nvSpPr>
-          <p:cNvPr id="50" name="shape50"/>
-          <p:cNvSpPr/>
-          <p:nvPr/>
-        </p:nvSpPr>
-        <p:spPr>
-          <a:xfrm>
-            <a:off x="4892040" y="1737360"/>
-            <a:ext cx="3421228" cy="237744"/>
-          </a:xfrm>
-          <a:prstGeom prst="rect">
-            <a:avLst/>
-          </a:prstGeom>
-          <a:noFill/>
-          <a:ln>
-            <a:noFill/>
-          </a:ln>
-        </p:spPr>
-        <p:txBody>
-          <a:bodyPr wrap="square" anchor="ctr" lIns="54864" rIns="54864" tIns="27432" bIns="27432"/>
-          <a:lstStyle/>
-          <a:p>
-            <a:pPr algn="ctr"/>
-            <a:r>
-              <a:rPr lang="en-AU" sz="900" b="1" dirty="0">
-                <a:solidFill>
-                  <a:srgbClr val="6B6A66"/>
-                </a:solidFill>
-                <a:latin typeface="Aptos"/>
-              </a:rPr>
-              <a:t>It answers</a:t>
-            </a:r>
-          </a:p>
-        </p:txBody>
-      </p:sp>
-      <p:sp>
-        <p:nvSpPr>
-          <p:cNvPr id="51" name="shape51"/>
-          <p:cNvSpPr/>
-          <p:nvPr/>
-        </p:nvSpPr>
-        <p:spPr>
-          <a:xfrm>
-            <a:off x="8313268" y="1737360"/>
-            <a:ext cx="3421228" cy="237744"/>
-          </a:xfrm>
-          <a:prstGeom prst="rect">
-            <a:avLst/>
-          </a:prstGeom>
-          <a:noFill/>
-          <a:ln>
-            <a:noFill/>
-          </a:ln>
-        </p:spPr>
-        <p:txBody>
-          <a:bodyPr wrap="square" anchor="ctr" lIns="54864" rIns="54864" tIns="27432" bIns="27432"/>
-          <a:lstStyle/>
-          <a:p>
-            <a:pPr algn="ctr"/>
-            <a:r>
-              <a:rPr lang="en-AU" sz="900" b="1" dirty="0">
-                <a:solidFill>
-                  <a:srgbClr val="6B6A66"/>
-                </a:solidFill>
-                <a:latin typeface="Aptos"/>
-              </a:rPr>
-              <a:t>It cannot answer</a:t>
-            </a:r>
-          </a:p>
-        </p:txBody>
-      </p:sp>
-      <p:sp>
-        <p:nvSpPr>
-          <p:cNvPr id="52" name="shape52"/>
-          <p:cNvSpPr/>
-          <p:nvPr/>
-        </p:nvSpPr>
-        <p:spPr>
-          <a:xfrm>
-            <a:off x="3520440" y="2002536"/>
-            <a:ext cx="1280160" cy="841248"/>
-          </a:xfrm>
-          <a:prstGeom prst="rect">
-            <a:avLst/>
-          </a:prstGeom>
-          <a:noFill/>
-          <a:ln>
-            <a:noFill/>
-          </a:ln>
-        </p:spPr>
-        <p:txBody>
           <a:bodyPr wrap="square" anchor="ctr" lIns="54864" rIns="54864" tIns="27432" bIns="27432"/>
           <a:lstStyle/>
           <a:p>
@@ -4015,14 +3767,14 @@
       </p:sp>
       <p:sp>
         <p:nvSpPr>
-          <p:cNvPr id="53" name="shape53"/>
+          <p:cNvPr id="46" name="shape46"/>
           <p:cNvSpPr/>
           <p:nvPr/>
         </p:nvSpPr>
         <p:spPr>
           <a:xfrm>
-            <a:off x="4928616" y="2002536"/>
-            <a:ext cx="3348076" cy="841248"/>
+            <a:off x="1865376" y="2203704"/>
+            <a:ext cx="4879696" cy="960120"/>
           </a:xfrm>
           <a:prstGeom prst="roundRect">
             <a:avLst>
@@ -4049,14 +3801,14 @@
       </p:sp>
       <p:sp>
         <p:nvSpPr>
-          <p:cNvPr id="54" name="shape54"/>
+          <p:cNvPr id="47" name="shape47"/>
           <p:cNvSpPr/>
           <p:nvPr/>
         </p:nvSpPr>
         <p:spPr>
           <a:xfrm>
-            <a:off x="8349844" y="2002536"/>
-            <a:ext cx="3348076" cy="841248"/>
+            <a:off x="6818224" y="2203704"/>
+            <a:ext cx="4879696" cy="960120"/>
           </a:xfrm>
           <a:prstGeom prst="roundRect">
             <a:avLst>
@@ -4083,14 +3835,14 @@
       </p:sp>
       <p:sp>
         <p:nvSpPr>
-          <p:cNvPr id="55" name="shape55"/>
+          <p:cNvPr id="48" name="shape48"/>
           <p:cNvSpPr/>
           <p:nvPr/>
         </p:nvSpPr>
         <p:spPr>
           <a:xfrm>
-            <a:off x="3520440" y="2916936"/>
-            <a:ext cx="1280160" cy="841248"/>
+            <a:off x="457200" y="3236976"/>
+            <a:ext cx="1280160" cy="960120"/>
           </a:xfrm>
           <a:prstGeom prst="rect">
             <a:avLst/>
@@ -4119,14 +3871,14 @@
       </p:sp>
       <p:sp>
         <p:nvSpPr>
-          <p:cNvPr id="56" name="shape56"/>
+          <p:cNvPr id="49" name="shape49"/>
           <p:cNvSpPr/>
           <p:nvPr/>
         </p:nvSpPr>
         <p:spPr>
           <a:xfrm>
-            <a:off x="4928616" y="2916936"/>
-            <a:ext cx="3348076" cy="841248"/>
+            <a:off x="1865376" y="3236976"/>
+            <a:ext cx="4879696" cy="960120"/>
           </a:xfrm>
           <a:prstGeom prst="roundRect">
             <a:avLst>
@@ -4153,14 +3905,14 @@
       </p:sp>
       <p:sp>
         <p:nvSpPr>
-          <p:cNvPr id="57" name="shape57"/>
+          <p:cNvPr id="50" name="shape50"/>
           <p:cNvSpPr/>
           <p:nvPr/>
         </p:nvSpPr>
         <p:spPr>
           <a:xfrm>
-            <a:off x="8349844" y="2916936"/>
-            <a:ext cx="3348076" cy="841248"/>
+            <a:off x="6818224" y="3236976"/>
+            <a:ext cx="4879696" cy="960120"/>
           </a:xfrm>
           <a:prstGeom prst="roundRect">
             <a:avLst>
@@ -4187,14 +3939,14 @@
       </p:sp>
       <p:sp>
         <p:nvSpPr>
-          <p:cNvPr id="58" name="shape58"/>
+          <p:cNvPr id="51" name="shape51"/>
           <p:cNvSpPr/>
           <p:nvPr/>
         </p:nvSpPr>
         <p:spPr>
           <a:xfrm>
-            <a:off x="3520440" y="3831336"/>
-            <a:ext cx="1280160" cy="841248"/>
+            <a:off x="457200" y="4270248"/>
+            <a:ext cx="1280160" cy="960120"/>
           </a:xfrm>
           <a:prstGeom prst="rect">
             <a:avLst/>
@@ -4223,14 +3975,14 @@
       </p:sp>
       <p:sp>
         <p:nvSpPr>
-          <p:cNvPr id="59" name="shape59"/>
+          <p:cNvPr id="52" name="shape52"/>
           <p:cNvSpPr/>
           <p:nvPr/>
         </p:nvSpPr>
         <p:spPr>
           <a:xfrm>
-            <a:off x="4928616" y="3831336"/>
-            <a:ext cx="3348076" cy="841248"/>
+            <a:off x="1865376" y="4270248"/>
+            <a:ext cx="4879696" cy="960120"/>
           </a:xfrm>
           <a:prstGeom prst="roundRect">
             <a:avLst>
@@ -4257,14 +4009,14 @@
       </p:sp>
       <p:sp>
         <p:nvSpPr>
-          <p:cNvPr id="60" name="shape60"/>
+          <p:cNvPr id="53" name="shape53"/>
           <p:cNvSpPr/>
           <p:nvPr/>
         </p:nvSpPr>
         <p:spPr>
           <a:xfrm>
-            <a:off x="8349844" y="3831336"/>
-            <a:ext cx="3348076" cy="841248"/>
+            <a:off x="6818224" y="4270248"/>
+            <a:ext cx="4879696" cy="960120"/>
           </a:xfrm>
           <a:prstGeom prst="roundRect">
             <a:avLst>
@@ -4291,14 +4043,14 @@
       </p:sp>
       <p:sp>
         <p:nvSpPr>
-          <p:cNvPr id="61" name="shape61"/>
+          <p:cNvPr id="54" name="shape54"/>
           <p:cNvSpPr/>
           <p:nvPr/>
         </p:nvSpPr>
         <p:spPr>
           <a:xfrm>
-            <a:off x="3520440" y="4745736"/>
-            <a:ext cx="1280160" cy="841248"/>
+            <a:off x="457200" y="5303520"/>
+            <a:ext cx="1280160" cy="960120"/>
           </a:xfrm>
           <a:prstGeom prst="rect">
             <a:avLst/>
@@ -4327,14 +4079,14 @@
       </p:sp>
       <p:sp>
         <p:nvSpPr>
-          <p:cNvPr id="62" name="shape62"/>
+          <p:cNvPr id="55" name="shape55"/>
           <p:cNvSpPr/>
           <p:nvPr/>
         </p:nvSpPr>
         <p:spPr>
           <a:xfrm>
-            <a:off x="4928616" y="4745736"/>
-            <a:ext cx="3348076" cy="841248"/>
+            <a:off x="1865376" y="5303520"/>
+            <a:ext cx="4879696" cy="960120"/>
           </a:xfrm>
           <a:prstGeom prst="roundRect">
             <a:avLst>
@@ -4361,14 +4113,14 @@
       </p:sp>
       <p:sp>
         <p:nvSpPr>
-          <p:cNvPr id="63" name="shape63"/>
+          <p:cNvPr id="56" name="shape56"/>
           <p:cNvSpPr/>
           <p:nvPr/>
         </p:nvSpPr>
         <p:spPr>
           <a:xfrm>
-            <a:off x="8349844" y="4745736"/>
-            <a:ext cx="3348076" cy="841248"/>
+            <a:off x="6818224" y="5303520"/>
+            <a:ext cx="4879696" cy="960120"/>
           </a:xfrm>
           <a:prstGeom prst="roundRect">
             <a:avLst>
@@ -4395,13 +4147,13 @@
       </p:sp>
       <p:sp>
         <p:nvSpPr>
-          <p:cNvPr id="64" name="shape64"/>
+          <p:cNvPr id="57" name="shape57"/>
           <p:cNvSpPr/>
           <p:nvPr/>
         </p:nvSpPr>
         <p:spPr>
           <a:xfrm>
-            <a:off x="3474720" y="2002536"/>
+            <a:off x="411480" y="2203704"/>
             <a:ext cx="1280160" cy="219456"/>
           </a:xfrm>
           <a:prstGeom prst="rect">
